--- a/docs/webinars/05-the-satis-appraisal-agent.pptx
+++ b/docs/webinars/05-the-satis-appraisal-agent.pptx
@@ -510,7 +510,7 @@
           <a:p>
             <a:r>
               <a:rPr lang="en-US" dirty="0"/>
-              <a:t>This session is about the Satis Appraisal agent — the desktop application, not the website. We'll cover what it does, where to download it, installing on Windows and Mac including the security prompts, connecting the AI features, and how the pricing research works.</a:t>
+              <a:t>This session is about the Satis Appraisal agent, the desktop application, not the website. We'll cover what it does, where to download it, installing on Windows and Mac including the security prompts, connecting the AI features, and how the pricing research works.</a:t>
             </a:r>
             <a:endParaRPr lang="en-US" dirty="0"/>
           </a:p>
@@ -774,7 +774,7 @@
           <a:p>
             <a:r>
               <a:rPr lang="en-US" dirty="0"/>
-              <a:t>The page always resolves “latest”, so never circulate saved installers — send colleagues to the page instead. Earlier versions remain available via the releases link at the bottom of the page.</a:t>
+              <a:t>The page always resolves “latest”, so never circulate saved installers. Send colleagues to the page instead. Earlier versions remain available via the releases link at the bottom of the page.</a:t>
             </a:r>
             <a:endParaRPr lang="en-US" dirty="0"/>
           </a:p>
@@ -862,7 +862,7 @@
           <a:p>
             <a:r>
               <a:rPr lang="en-US" dirty="0"/>
-              <a:t>Rehearse the security prompts out loud — “More info → Run anyway” on Windows, Control-click → Open on Mac — because that's the moment people stall and call for help.</a:t>
+              <a:t>Rehearse the security prompts out loud (“More info → Run anyway” on Windows, Control-click → Open on Mac) because that's the moment people stall and call for help.</a:t>
             </a:r>
             <a:endParaRPr lang="en-US" dirty="0"/>
           </a:p>
@@ -950,7 +950,7 @@
           <a:p>
             <a:r>
               <a:rPr lang="en-US" dirty="0"/>
-              <a:t>Most of the team should use Option A — no keys to manage. Make clear the app degrades gracefully: no connection just means importing floorplans via DXF or typing floors in.</a:t>
+              <a:t>Most of the team should use Option A: no keys to manage. Make clear the app degrades gracefully. No connection just means importing floorplans via DXF or typing floors in.</a:t>
             </a:r>
             <a:endParaRPr lang="en-US" dirty="0"/>
           </a:p>
@@ -1038,7 +1038,7 @@
           <a:p>
             <a:r>
               <a:rPr lang="en-US" dirty="0"/>
-              <a:t>The design principle to voice: the app shows its working — range, reasoning, sources — precisely so a human can disagree. Encourage recording tender results; anchored estimates beat generic benchmarks.</a:t>
+              <a:t>The design principle to voice: the app shows its working (range, reasoning, sources) precisely so a human can disagree. Encourage recording tender results; anchored estimates beat generic benchmarks.</a:t>
             </a:r>
             <a:endParaRPr lang="en-US" dirty="0"/>
           </a:p>
@@ -1126,7 +1126,7 @@
           <a:p>
             <a:r>
               <a:rPr lang="en-US" dirty="0"/>
-              <a:t>Improvement requests for the app go to the Appraisalapplication repository — a Claude session works there exactly as it does on the website repo. That's the bridge to webinar 01's workflow.</a:t>
+              <a:t>Improvement requests for the app go to the Appraisalapplication repository. A Claude session works there exactly as it does on the website repo. That's the bridge to webinar 01's workflow.</a:t>
             </a:r>
             <a:endParaRPr lang="en-US" dirty="0"/>
           </a:p>
@@ -1689,7 +1689,7 @@
                 <a:ea typeface="Work Sans" pitchFamily="34" charset="-122"/>
                 <a:cs typeface="Work Sans" pitchFamily="34" charset="-120"/>
               </a:rPr>
-              <a:t>SATIS GROUP — BACKEND WEBINAR SERIES</a:t>
+              <a:t>SATIS GROUP · BACKEND WEBINAR SERIES</a:t>
             </a:r>
             <a:endParaRPr lang="en-US" sz="950" dirty="0"/>
           </a:p>
@@ -2091,7 +2091,7 @@
                 <a:ea typeface="Work Sans" pitchFamily="34" charset="-122"/>
                 <a:cs typeface="Work Sans" pitchFamily="34" charset="-120"/>
               </a:rPr>
-              <a:t>SATIS GROUP — THE SATIS APPRAISAL AGENT</a:t>
+              <a:t>SATIS GROUP · THE SATIS APPRAISAL AGENT</a:t>
             </a:r>
             <a:endParaRPr lang="en-US" sz="700" dirty="0"/>
           </a:p>
@@ -2451,7 +2451,7 @@
                 <a:ea typeface="Work Sans" pitchFamily="34" charset="-122"/>
                 <a:cs typeface="Work Sans" pitchFamily="34" charset="-120"/>
               </a:rPr>
-              <a:t>The admin's Appraisal page — always the newest version.</a:t>
+              <a:t>The admin's Appraisal page. Always the newest version.</a:t>
             </a:r>
             <a:endParaRPr lang="en-US" sz="950" dirty="0"/>
           </a:p>
@@ -2691,7 +2691,7 @@
                 <a:ea typeface="Work Sans" pitchFamily="34" charset="-122"/>
                 <a:cs typeface="Work Sans" pitchFamily="34" charset="-120"/>
               </a:rPr>
-              <a:t>A Claude account or API key — and what works without.</a:t>
+              <a:t>A Claude account or API key, and what works without.</a:t>
             </a:r>
             <a:endParaRPr lang="en-US" sz="950" dirty="0"/>
           </a:p>
@@ -3135,7 +3135,7 @@
                 <a:ea typeface="Work Sans" pitchFamily="34" charset="-122"/>
                 <a:cs typeface="Work Sans" pitchFamily="34" charset="-120"/>
               </a:rPr>
-              <a:t>SATIS GROUP — THE SATIS APPRAISAL AGENT</a:t>
+              <a:t>SATIS GROUP · THE SATIS APPRAISAL AGENT</a:t>
             </a:r>
             <a:endParaRPr lang="en-US" sz="700" dirty="0"/>
           </a:p>
@@ -3255,7 +3255,7 @@
                 <a:ea typeface="Work Sans" pitchFamily="34" charset="-122"/>
                 <a:cs typeface="Work Sans" pitchFamily="34" charset="-120"/>
               </a:rPr>
-              <a:t>The app works through a building the way the team does — mirroring the Satis Appraisal Model workbook:</a:t>
+              <a:t>The app works through a building the way the team does, mirroring the Satis Appraisal Model workbook:</a:t>
             </a:r>
             <a:endParaRPr lang="en-US" sz="1150" dirty="0"/>
           </a:p>
@@ -3535,7 +3535,7 @@
                 <a:ea typeface="Work Sans" pitchFamily="34" charset="-122"/>
                 <a:cs typeface="Work Sans" pitchFamily="34" charset="-120"/>
               </a:rPr>
-              <a:t>The ways the building could be converted — layouts generated and compared.</a:t>
+              <a:t>The ways the building could be converted: layouts generated and compared.</a:t>
             </a:r>
             <a:endParaRPr lang="en-US" sz="1050" dirty="0"/>
           </a:p>
@@ -3815,7 +3815,7 @@
                 <a:ea typeface="Work Sans" pitchFamily="34" charset="-122"/>
                 <a:cs typeface="Work Sans" pitchFamily="34" charset="-120"/>
               </a:rPr>
-              <a:t>Costs, values, finance and returns per option — stamp duty calculates itself from HMRC bands.</a:t>
+              <a:t>Costs, values, finance and returns per option. Stamp duty calculates itself from HMRC bands.</a:t>
             </a:r>
             <a:endParaRPr lang="en-US" sz="1050" dirty="0"/>
           </a:p>
@@ -4144,7 +4144,7 @@
                 <a:ea typeface="Work Sans" pitchFamily="34" charset="-122"/>
                 <a:cs typeface="Work Sans" pitchFamily="34" charset="-120"/>
               </a:rPr>
-              <a:t>SATIS GROUP — THE SATIS APPRAISAL AGENT</a:t>
+              <a:t>SATIS GROUP · THE SATIS APPRAISAL AGENT</a:t>
             </a:r>
             <a:endParaRPr lang="en-US" sz="700" dirty="0"/>
           </a:p>
@@ -4267,7 +4267,7 @@
                 <a:ea typeface="Work Sans" pitchFamily="34" charset="-122"/>
                 <a:cs typeface="Work Sans" pitchFamily="34" charset="-120"/>
               </a:rPr>
-              <a:t>From the control room, open the Appraisal agent download card. Two buttons — Windows and Mac — always give you the newest version; there is nothing to configure.
+              <a:t>From the control room, open the Appraisal agent download card. Two buttons (Windows and Mac) always give you the newest version; there is nothing to configure.
 </a:t>
             </a:r>
             <a:pPr indent="0" marL="0">
@@ -4330,7 +4330,7 @@
                 <a:ea typeface="Work Sans" pitchFamily="34" charset="-122"/>
                 <a:cs typeface="Work Sans" pitchFamily="34" charset="-120"/>
               </a:rPr>
-              <a:t>The page shows the latest version number, and the same buttons reinstall or update — just download and run again.
+              <a:t>The page shows the latest version number, and the same buttons reinstall or update. Just download and run again.
 </a:t>
             </a:r>
             <a:endParaRPr lang="en-US" sz="1100" dirty="0"/>
@@ -4544,7 +4544,7 @@
                 <a:ea typeface="Work Sans" pitchFamily="34" charset="-122"/>
                 <a:cs typeface="Work Sans" pitchFamily="34" charset="-120"/>
               </a:rPr>
-              <a:t>The download page is part of the admin area — sign in at /admin first.</a:t>
+              <a:t>The download page is part of the admin area. Sign in at /admin first.</a:t>
             </a:r>
             <a:endParaRPr lang="en-US" sz="1100" dirty="0"/>
           </a:p>
@@ -4748,7 +4748,7 @@
                 <a:ea typeface="Work Sans" pitchFamily="34" charset="-122"/>
                 <a:cs typeface="Work Sans" pitchFamily="34" charset="-120"/>
               </a:rPr>
-              <a:t>SATIS GROUP — THE SATIS APPRAISAL AGENT</a:t>
+              <a:t>SATIS GROUP · THE SATIS APPRAISAL AGENT</a:t>
             </a:r>
             <a:endParaRPr lang="en-US" sz="700" dirty="0"/>
           </a:p>
@@ -4826,7 +4826,7 @@
                 <a:ea typeface="Work Sans" pitchFamily="34" charset="-122"/>
                 <a:cs typeface="Work Sans" pitchFamily="34" charset="-120"/>
               </a:rPr>
-              <a:t>Installing — and the one-time security prompt.</a:t>
+              <a:t>Installing, and the one-time security prompt.</a:t>
             </a:r>
             <a:endParaRPr lang="en-US" sz="2500" dirty="0"/>
           </a:p>
@@ -4868,7 +4868,7 @@
                 <a:ea typeface="Work Sans" pitchFamily="34" charset="-122"/>
                 <a:cs typeface="Work Sans" pitchFamily="34" charset="-120"/>
               </a:rPr>
-              <a:t>The app is distributed privately by Satis Group rather than through the Microsoft Store or App Store, so each system asks once for confirmation. This is expected — here is exactly what to click:</a:t>
+              <a:t>The app is distributed privately by Satis Group rather than through the Microsoft Store or App Store, so each system asks once for confirmation. This is expected. Here is exactly what to click:</a:t>
             </a:r>
             <a:endParaRPr lang="en-US" sz="1150" dirty="0"/>
           </a:p>
@@ -4977,7 +4977,7 @@
                 <a:ea typeface="Work Sans" pitchFamily="34" charset="-122"/>
                 <a:cs typeface="Work Sans" pitchFamily="34" charset="-120"/>
               </a:rPr>
-              <a:t>Click the Windows button — Satis-Appraisal-Setup.exe saves to Downloads.</a:t>
+              <a:t>Click the Windows button. Satis-Appraisal-Setup.exe saves to Downloads.</a:t>
             </a:r>
             <a:endParaRPr lang="en-US" sz="1050" dirty="0"/>
           </a:p>
@@ -5052,7 +5052,7 @@
                 <a:ea typeface="Work Sans" pitchFamily="34" charset="-122"/>
                 <a:cs typeface="Work Sans" pitchFamily="34" charset="-120"/>
               </a:rPr>
-              <a:t>Follow the installer — Next, choose the suggested folder, Install.</a:t>
+              <a:t>Follow the installer: Next, choose the suggested folder, Install.</a:t>
             </a:r>
             <a:endParaRPr lang="en-US" sz="1050" dirty="0"/>
           </a:p>
@@ -5186,7 +5186,7 @@
                 <a:ea typeface="Work Sans" pitchFamily="34" charset="-122"/>
                 <a:cs typeface="Work Sans" pitchFamily="34" charset="-120"/>
               </a:rPr>
-              <a:t>Click the Mac button — Satis-Appraisal.dmg saves to Downloads.</a:t>
+              <a:t>Click the Mac button. Satis-Appraisal.dmg saves to Downloads.</a:t>
             </a:r>
             <a:endParaRPr lang="en-US" sz="1050" dirty="0"/>
           </a:p>
@@ -5386,7 +5386,7 @@
                 <a:ea typeface="Work Sans" pitchFamily="34" charset="-122"/>
                 <a:cs typeface="Work Sans" pitchFamily="34" charset="-120"/>
               </a:rPr>
-              <a:t>No need to memorise — /admin/appraisal carries this walkthrough, so installers always have it to hand.</a:t>
+              <a:t>No need to memorise. /admin/appraisal carries this walkthrough, so installers always have it to hand.</a:t>
             </a:r>
             <a:endParaRPr lang="en-US" sz="1100" dirty="0"/>
           </a:p>
@@ -5590,7 +5590,7 @@
                 <a:ea typeface="Work Sans" pitchFamily="34" charset="-122"/>
                 <a:cs typeface="Work Sans" pitchFamily="34" charset="-120"/>
               </a:rPr>
-              <a:t>SATIS GROUP — THE SATIS APPRAISAL AGENT</a:t>
+              <a:t>SATIS GROUP · THE SATIS APPRAISAL AGENT</a:t>
             </a:r>
             <a:endParaRPr lang="en-US" sz="700" dirty="0"/>
           </a:p>
@@ -5710,7 +5710,7 @@
                 <a:ea typeface="Work Sans" pitchFamily="34" charset="-122"/>
                 <a:cs typeface="Work Sans" pitchFamily="34" charset="-120"/>
               </a:rPr>
-              <a:t>The AI features — reading floorplans from PDFs and photos, and pricing research — need a Claude connection, set up once inside the app:</a:t>
+              <a:t>The AI features (reading floorplans from PDFs and photos, and pricing research) need a Claude connection, set up once inside the app:</a:t>
             </a:r>
             <a:endParaRPr lang="en-US" sz="1150" dirty="0"/>
           </a:p>
@@ -5780,7 +5780,7 @@
                 <a:ea typeface="Work Sans" pitchFamily="34" charset="-122"/>
                 <a:cs typeface="Work Sans" pitchFamily="34" charset="-120"/>
               </a:rPr>
-              <a:t>Option A — sign in with Claude
+              <a:t>Option A: sign in with Claude
 </a:t>
             </a:r>
             <a:pPr indent="0" marL="0">
@@ -5871,7 +5871,7 @@
                 <a:ea typeface="Work Sans" pitchFamily="34" charset="-122"/>
                 <a:cs typeface="Work Sans" pitchFamily="34" charset="-120"/>
               </a:rPr>
-              <a:t>Option B — paste an API key
+              <a:t>Option B: paste an API key
 </a:t>
             </a:r>
             <a:pPr indent="0" marL="0">
@@ -5983,7 +5983,7 @@
                 <a:ea typeface="Work Sans" pitchFamily="34" charset="-122"/>
                 <a:cs typeface="Work Sans" pitchFamily="34" charset="-120"/>
               </a:rPr>
-              <a:t>DXF floorplan files and manual floor entry work without any AI connection — only PDF/photo reading and pricing research need one.</a:t>
+              <a:t>DXF floorplan files and manual floor entry work without any AI connection. Only PDF/photo reading and pricing research need one.</a:t>
             </a:r>
             <a:endParaRPr lang="en-US" sz="1100" dirty="0"/>
           </a:p>
@@ -6187,7 +6187,7 @@
                 <a:ea typeface="Work Sans" pitchFamily="34" charset="-122"/>
                 <a:cs typeface="Work Sans" pitchFamily="34" charset="-120"/>
               </a:rPr>
-              <a:t>SATIS GROUP — THE SATIS APPRAISAL AGENT</a:t>
+              <a:t>SATIS GROUP · THE SATIS APPRAISAL AGENT</a:t>
             </a:r>
             <a:endParaRPr lang="en-US" sz="700" dirty="0"/>
           </a:p>
@@ -6265,7 +6265,7 @@
                 <a:ea typeface="Work Sans" pitchFamily="34" charset="-122"/>
                 <a:cs typeface="Work Sans" pitchFamily="34" charset="-120"/>
               </a:rPr>
-              <a:t>Live market evidence — suggested, sourced, never imposed.</a:t>
+              <a:t>Live market evidence: suggested, sourced, never imposed.</a:t>
             </a:r>
             <a:endParaRPr lang="en-US" sz="2500" dirty="0"/>
           </a:p>
@@ -6447,7 +6447,7 @@
                 <a:ea typeface="Work Sans" pitchFamily="34" charset="-122"/>
                 <a:cs typeface="Work Sans" pitchFamily="34" charset="-120"/>
               </a:rPr>
-              <a:t>Local sale and rent comparables, build cost benchmarks and current finance rates — with a progress bar showing each web search as it happens.</a:t>
+              <a:t>Local sale and rent comparables, build cost benchmarks and current finance rates, with a progress bar showing each web search as it happens.</a:t>
             </a:r>
             <a:endParaRPr lang="en-US" sz="1050" dirty="0"/>
           </a:p>
@@ -6727,7 +6727,7 @@
                 <a:ea typeface="Work Sans" pitchFamily="34" charset="-122"/>
                 <a:cs typeface="Work Sans" pitchFamily="34" charset="-120"/>
               </a:rPr>
-              <a:t>Record tender results and lender term sheets in Settings — the estimates then anchor to your real numbers.</a:t>
+              <a:t>Record tender results and lender term sheets in Settings; the estimates then anchor to your real numbers.</a:t>
             </a:r>
             <a:endParaRPr lang="en-US" sz="1050" dirty="0"/>
           </a:p>
@@ -7196,7 +7196,7 @@
                 <a:ea typeface="Work Sans" pitchFamily="34" charset="-122"/>
                 <a:cs typeface="Work Sans" pitchFamily="34" charset="-120"/>
               </a:rPr>
-              <a:t>SATIS GROUP — THE SATIS APPRAISAL AGENT</a:t>
+              <a:t>SATIS GROUP · THE SATIS APPRAISAL AGENT</a:t>
             </a:r>
             <a:endParaRPr lang="en-US" sz="700" dirty="0"/>
           </a:p>
@@ -7365,7 +7365,7 @@
                 <a:ea typeface="Work Sans" pitchFamily="34" charset="-122"/>
                 <a:cs typeface="Work Sans" pitchFamily="34" charset="-120"/>
               </a:rPr>
-              <a:t>Download and run the installer again from /admin/appraisal — same buttons, newest version, settings kept.</a:t>
+              <a:t>Download and run the installer again from /admin/appraisal. Same buttons, newest version, settings kept.</a:t>
             </a:r>
             <a:endParaRPr lang="en-US" sz="1100" dirty="0"/>
           </a:p>
@@ -7547,7 +7547,7 @@
                 <a:ea typeface="Work Sans" pitchFamily="34" charset="-122"/>
                 <a:cs typeface="Work Sans" pitchFamily="34" charset="-120"/>
               </a:rPr>
-              <a:t>The app is built from its own repository — Satisgroup-1/Appraisalapplication on GitHub — separate from the website. Earlier versions stay available on its releases page.</a:t>
+              <a:t>The app is built from its own repository, Satisgroup-1/Appraisalapplication on GitHub, separate from the website. Earlier versions stay available on its releases page.</a:t>
             </a:r>
             <a:endParaRPr lang="en-US" sz="1100" dirty="0"/>
           </a:p>
@@ -7758,7 +7758,7 @@
                 <a:ea typeface="Work Sans" pitchFamily="34" charset="-122"/>
                 <a:cs typeface="Work Sans" pitchFamily="34" charset="-120"/>
               </a:rPr>
-              <a:t>SATIS GROUP — THE SATIS APPRAISAL AGENT</a:t>
+              <a:t>SATIS GROUP · THE SATIS APPRAISAL AGENT</a:t>
             </a:r>
             <a:endParaRPr lang="en-US" sz="700" dirty="0"/>
           </a:p>
@@ -7906,7 +7906,7 @@
                 <a:ea typeface="Work Sans" pitchFamily="34" charset="-122"/>
                 <a:cs typeface="Work Sans" pitchFamily="34" charset="-120"/>
               </a:rPr>
-              <a:t>Always download from /admin/appraisal — the buttons always give the newest version.</a:t>
+              <a:t>Always download from /admin/appraisal. The buttons always give the newest version.</a:t>
             </a:r>
             <a:endParaRPr lang="en-US" sz="1250" dirty="0"/>
           </a:p>
@@ -7978,7 +7978,7 @@
                 <a:ea typeface="Work Sans" pitchFamily="34" charset="-122"/>
                 <a:cs typeface="Work Sans" pitchFamily="34" charset="-120"/>
               </a:rPr>
-              <a:t>Pricing research is suggested and sourced — applied only when you choose.</a:t>
+              <a:t>Pricing research is suggested and sourced, applied only when you choose.</a:t>
             </a:r>
             <a:endParaRPr lang="en-US" sz="1250" dirty="0"/>
           </a:p>
